--- a/decks/hist-hastings/hist-hastings_ch2_harolds-summer.pptx
+++ b/decks/hist-hastings/hist-hastings_ch2_harolds-summer.pptx
@@ -124,37 +124,37 @@
   <p:extLst>
     <p:ext uri="{521415D9-36F7-43E2-AB2F-B90AF26B5E84}">
       <p14:sectionLst xmlns:p14="http://schemas.microsoft.com/office/powerpoint/2010/main">
-        <p14:section name="Opening" id="{65a33736-c91d-9a3c-2863-78692b5373b5}">
+        <p14:section name="Opening" id="{aaf1ca2f-22ce-50cf-5c8e-f558bb280b45}">
           <p14:sldIdLst>
             <p14:sldId id="256"/>
           </p14:sldIdLst>
         </p14:section>
-        <p14:section name="Gate" id="{88a78c93-41dd-d915-778b-38ec6b22a283}">
+        <p14:section name="Gate" id="{0e98bd72-8db5-0c9b-086c-6c6f35aaf743}">
           <p14:sldIdLst>
             <p14:sldId id="257"/>
             <p14:sldId id="258"/>
             <p14:sldId id="259"/>
           </p14:sldIdLst>
         </p14:section>
-        <p14:section name="Pre-teach" id="{729ea88f-7310-b043-adeb-d3de38d3f89a}">
+        <p14:section name="Pre-teach" id="{979453d4-1717-c386-cea6-f52b73920c42}">
           <p14:sldIdLst>
             <p14:sldId id="260"/>
           </p14:sldIdLst>
         </p14:section>
-        <p14:section name="Read-along" id="{bf887ba7-2a07-bc9e-4fbb-510b45922946}">
+        <p14:section name="Read-along" id="{03bd22d5-244c-f3d2-70a5-7f73e04344f1}">
           <p14:sldIdLst>
             <p14:sldId id="261"/>
             <p14:sldId id="262"/>
           </p14:sldIdLst>
         </p14:section>
-        <p14:section name="Teach" id="{fbbe7561-7df1-e355-3a92-bf45ebc6a554}">
+        <p14:section name="Teach" id="{34072901-ce4b-179d-6c71-bcbd3bd5c865}">
           <p14:sldIdLst>
             <p14:sldId id="263"/>
             <p14:sldId id="264"/>
             <p14:sldId id="265"/>
           </p14:sldIdLst>
         </p14:section>
-        <p14:section name="Routes" id="{d63e158b-253a-f8cd-d1aa-12739935c53d}">
+        <p14:section name="Routes" id="{28e31239-9e25-1d42-9624-4853fd811a97}">
           <p14:sldIdLst>
             <p14:sldId id="266"/>
             <p14:sldId id="267"/>
@@ -162,12 +162,12 @@
             <p14:sldId id="269"/>
           </p14:sldIdLst>
         </p14:section>
-        <p14:section name="Close" id="{29a6779e-a341-a7ab-248e-30492749befb}">
+        <p14:section name="Close" id="{7a343ef5-2745-2377-fe67-e1b407ca97f8}">
           <p14:sldIdLst>
             <p14:sldId id="270"/>
           </p14:sldIdLst>
         </p14:section>
-        <p14:section name="Answers" id="{8e53a45b-f5bf-7a00-8e35-911016844d96}">
+        <p14:section name="Answers" id="{95d36bb0-b4af-d954-370e-66c278876ddd}">
           <p14:sldIdLst>
             <p14:sldId id="271"/>
             <p14:sldId id="272"/>
@@ -1139,7 +1139,7 @@
               <a:rPr lang="en-US" dirty="0"/>
               <a:t>Exit ticket — individual, silent, on a slip or mini-whiteboard. Recall before help: no notes, no lanes, no hints. Collect before pupils leave.
 Question: Why did Harold keep his army on the south coast through the summer of 1066?
-Answer: D   William was closer, had the best army in Europe and the Pope's support. Harold expected William, the nearer and stronger enemy, to land in the south. The Pope's support made William look even more dangerous.
+Answer: A   William was closer, had the best army in Europe and the Pope's support. Harold expected William, the nearer and stronger enemy, to land in the south. The Pope's support made William look even more dangerous.
 Source of this question: gate item 1 re-asked (options rotated) — this chapter has no third quick-check module.
 Sort the slips: correct → ready to move on; incorrect → start next lesson in the pre-teach group, with the read-along and the Support lane. Same destination next time.</a:t>
             </a:r>
@@ -1412,7 +1412,7 @@
             <a:r>
               <a:rPr lang="en-US" dirty="0"/>
               <a:t>Answers — exit ticket: Exit ticket. Reveal the answer; pupils mark their own work in a different colour, then read the "why" together. Same destination for every lane, so one answer serves the whole class.
-Answer: D   William was closer, had the best army in Europe and the Pope's support
+Answer: A   William was closer, had the best army in Europe and the Pope's support
 Why: Harold expected William, the nearer and stronger enemy, to land in the south. The Pope's support made William look even more dangerous.
 Ask a Support pupil to explain one step, and a Stretch pupil to share their extension.</a:t>
             </a:r>
@@ -1503,9 +1503,9 @@
             <a:r>
               <a:rPr lang="en-US" dirty="0"/>
               <a:t>Do now — retrieval. Silent, no notes, no help: recall comes before any support. Give about four minutes.
-1. Why did Harold keep his army on the south coast through the summer of 1066?  →  A   William was closer, had the best army in Europe and the Pope's support
+1. Why did Harold keep his army on the south coast through the summer of 1066?  →  B   William was closer, had the best army in Europe and the Pope's support
 2. By September, Harold had to decide whether to send his army home for the ___.  →  harvest
-3. Why could William not sail to England during the summer of 1066?  →  A   Very bad weather kept his ships in Normandy
+3. Why could William not sail to England during the summer of 1066?  →  B   Very bad weather kept his ships in Normandy
 Circulate: who gets 3/3 (Stretch route), 2/3 (Core), 0–1 (Support)? Use this to route pupils later in the lesson.</a:t>
             </a:r>
             <a:endParaRPr lang="en-US" dirty="0"/>
@@ -1595,9 +1595,9 @@
             <a:r>
               <a:rPr lang="en-US" dirty="0"/>
               <a:t>Do now — retrieval. Silent, no notes, no help: recall comes before any support. Give about four minutes.
-1. Why did Harold keep his army on the south coast through the summer of 1066?  →  A   William was closer, had the best army in Europe and the Pope's support
+1. Why did Harold keep his army on the south coast through the summer of 1066?  →  B   William was closer, had the best army in Europe and the Pope's support
 2. By September, Harold had to decide whether to send his army home for the ___.  →  harvest
-3. Why could William not sail to England during the summer of 1066?  →  A   Very bad weather kept his ships in Normandy
+3. Why could William not sail to England during the summer of 1066?  →  B   Very bad weather kept his ships in Normandy
 Circulate: who gets 3/3 (Stretch route), 2/3 (Core), 0–1 (Support)? Use this to route pupils later in the lesson.</a:t>
             </a:r>
             <a:endParaRPr lang="en-US" dirty="0"/>
@@ -1687,9 +1687,9 @@
             <a:r>
               <a:rPr lang="en-US" dirty="0"/>
               <a:t>Answers — pupils mark their own in a different colour, then hands up for 3/3, 2/3, 1/3.
-1. A   William was closer, had the best army in Europe and the Pope's support. Harold expected William, the nearer and stronger enemy, to land in the south. The Pope's support made William look even more dangerous.
+1. B   William was closer, had the best army in Europe and the Pope's support. Harold expected William, the nearer and stronger enemy, to land in the south. The Pope's support made William look even more dangerous.
 2. harvest. Most of Harold's soldiers were farmers. If the harvest was not gathered, the kingdom would starve.
-3. A   Very bad weather kept his ships in Normandy. All summer the weather was against William. His fleet could not cross the Channel until the wind changed in the autumn.
+3. B   Very bad weather kept his ships in Normandy. All summer the weather was against William. His fleet could not cross the Channel until the wind changed in the autumn.
 Say the route each score points to: 3/3 Stretch, 2/3 Core, 0–1 Support. Pupils may choose to move up.</a:t>
             </a:r>
             <a:endParaRPr lang="en-US" dirty="0"/>
@@ -8391,7 +8391,7 @@
                 <a:ea typeface="Calibri" pitchFamily="34" charset="-122"/>
                 <a:cs typeface="Calibri" pitchFamily="34" charset="-120"/>
               </a:rPr>
-              <a:t>The south coast had the best harvest</a:t>
+              <a:t>William was closer, had the best army in Europe and the Pope's support</a:t>
             </a:r>
             <a:endParaRPr lang="en-US" sz="2400" dirty="0"/>
           </a:p>
@@ -8428,7 +8428,7 @@
                 <a:ea typeface="Calibri" pitchFamily="34" charset="-122"/>
                 <a:cs typeface="Calibri" pitchFamily="34" charset="-120"/>
               </a:rPr>
-              <a:t>Hardrada had already been defeated</a:t>
+              <a:t>The south coast had the best harvest</a:t>
             </a:r>
             <a:endParaRPr lang="en-US" sz="2400" dirty="0"/>
           </a:p>
@@ -8465,7 +8465,7 @@
                 <a:ea typeface="Calibri" pitchFamily="34" charset="-122"/>
                 <a:cs typeface="Calibri" pitchFamily="34" charset="-120"/>
               </a:rPr>
-              <a:t>The English nobles lived in the south</a:t>
+              <a:t>Hardrada had already been defeated</a:t>
             </a:r>
             <a:endParaRPr lang="en-US" sz="2400" dirty="0"/>
           </a:p>
@@ -8502,7 +8502,7 @@
                 <a:ea typeface="Calibri" pitchFamily="34" charset="-122"/>
                 <a:cs typeface="Calibri" pitchFamily="34" charset="-120"/>
               </a:rPr>
-              <a:t>William was closer, had the best army in Europe and the Pope's support</a:t>
+              <a:t>The English nobles lived in the south</a:t>
             </a:r>
             <a:endParaRPr lang="en-US" sz="2400" dirty="0"/>
           </a:p>
@@ -9936,7 +9936,7 @@
                 <a:ea typeface="Cambria" pitchFamily="34" charset="-122"/>
                 <a:cs typeface="Cambria" pitchFamily="34" charset="-120"/>
               </a:rPr>
-              <a:t>D   William was closer, had the best army in Europe and the Pope's support</a:t>
+              <a:t>A   William was closer, had the best army in Europe and the Pope's support</a:t>
             </a:r>
             <a:endParaRPr lang="en-US" sz="1800" dirty="0"/>
           </a:p>
@@ -10470,7 +10470,7 @@
                 <a:ea typeface="Calibri" pitchFamily="34" charset="-122"/>
                 <a:cs typeface="Calibri" pitchFamily="34" charset="-120"/>
               </a:rPr>
-              <a:t>William was closer, had the best army in Europe and the Pope's support</a:t>
+              <a:t>The English nobles lived in the south</a:t>
             </a:r>
             <a:endParaRPr lang="en-US" sz="2200" dirty="0"/>
           </a:p>
@@ -10507,7 +10507,7 @@
                 <a:ea typeface="Calibri" pitchFamily="34" charset="-122"/>
                 <a:cs typeface="Calibri" pitchFamily="34" charset="-120"/>
               </a:rPr>
-              <a:t>The south coast had the best harvest</a:t>
+              <a:t>William was closer, had the best army in Europe and the Pope's support</a:t>
             </a:r>
             <a:endParaRPr lang="en-US" sz="2200" dirty="0"/>
           </a:p>
@@ -10544,7 +10544,7 @@
                 <a:ea typeface="Calibri" pitchFamily="34" charset="-122"/>
                 <a:cs typeface="Calibri" pitchFamily="34" charset="-120"/>
               </a:rPr>
-              <a:t>Hardrada had already been defeated</a:t>
+              <a:t>The south coast had the best harvest</a:t>
             </a:r>
             <a:endParaRPr lang="en-US" sz="2200" dirty="0"/>
           </a:p>
@@ -10581,7 +10581,7 @@
                 <a:ea typeface="Calibri" pitchFamily="34" charset="-122"/>
                 <a:cs typeface="Calibri" pitchFamily="34" charset="-120"/>
               </a:rPr>
-              <a:t>The English nobles lived in the south</a:t>
+              <a:t>Hardrada had already been defeated</a:t>
             </a:r>
             <a:endParaRPr lang="en-US" sz="2200" dirty="0"/>
           </a:p>
@@ -11193,7 +11193,7 @@
                 <a:ea typeface="Calibri" pitchFamily="34" charset="-122"/>
                 <a:cs typeface="Calibri" pitchFamily="34" charset="-120"/>
               </a:rPr>
-              <a:t>Very bad weather kept his ships in Normandy</a:t>
+              <a:t>His ships had not been built yet</a:t>
             </a:r>
             <a:endParaRPr lang="en-US" sz="2400" dirty="0"/>
           </a:p>
@@ -11230,7 +11230,7 @@
                 <a:ea typeface="Calibri" pitchFamily="34" charset="-122"/>
                 <a:cs typeface="Calibri" pitchFamily="34" charset="-120"/>
               </a:rPr>
-              <a:t>The Pope forbade him to sail</a:t>
+              <a:t>Very bad weather kept his ships in Normandy</a:t>
             </a:r>
             <a:endParaRPr lang="en-US" sz="2400" dirty="0"/>
           </a:p>
@@ -11304,7 +11304,7 @@
                 <a:ea typeface="Calibri" pitchFamily="34" charset="-122"/>
                 <a:cs typeface="Calibri" pitchFamily="34" charset="-120"/>
               </a:rPr>
-              <a:t>His ships had not been built yet</a:t>
+              <a:t>The Pope forbade him to sail</a:t>
             </a:r>
             <a:endParaRPr lang="en-US" sz="2400" dirty="0"/>
           </a:p>
@@ -11705,7 +11705,7 @@
                 <a:ea typeface="Calibri" pitchFamily="34" charset="-122"/>
                 <a:cs typeface="Calibri" pitchFamily="34" charset="-120"/>
               </a:rPr>
-              <a:t>A   William was closer, had the best army in Europe and the Pope's support</a:t>
+              <a:t>B   William was closer, had the best army in Europe and the Pope's support</a:t>
             </a:r>
             <a:endParaRPr lang="en-US" sz="2200" dirty="0"/>
           </a:p>
@@ -12185,7 +12185,7 @@
                 <a:ea typeface="Calibri" pitchFamily="34" charset="-122"/>
                 <a:cs typeface="Calibri" pitchFamily="34" charset="-120"/>
               </a:rPr>
-              <a:t>A   Very bad weather kept his ships in Normandy</a:t>
+              <a:t>B   Very bad weather kept his ships in Normandy</a:t>
             </a:r>
             <a:endParaRPr lang="en-US" sz="2200" dirty="0"/>
           </a:p>

--- a/decks/hist-hastings/hist-hastings_ch2_harolds-summer.pptx
+++ b/decks/hist-hastings/hist-hastings_ch2_harolds-summer.pptx
@@ -124,37 +124,37 @@
   <p:extLst>
     <p:ext uri="{521415D9-36F7-43E2-AB2F-B90AF26B5E84}">
       <p14:sectionLst xmlns:p14="http://schemas.microsoft.com/office/powerpoint/2010/main">
-        <p14:section name="Opening" id="{aaf1ca2f-22ce-50cf-5c8e-f558bb280b45}">
+        <p14:section name="Opening" id="{abb38bf0-e262-dac5-9597-fb9561d0bfcf}">
           <p14:sldIdLst>
             <p14:sldId id="256"/>
           </p14:sldIdLst>
         </p14:section>
-        <p14:section name="Gate" id="{0e98bd72-8db5-0c9b-086c-6c6f35aaf743}">
+        <p14:section name="Gate" id="{03600fc6-3622-f143-8581-ffba6e58852d}">
           <p14:sldIdLst>
             <p14:sldId id="257"/>
             <p14:sldId id="258"/>
             <p14:sldId id="259"/>
           </p14:sldIdLst>
         </p14:section>
-        <p14:section name="Pre-teach" id="{979453d4-1717-c386-cea6-f52b73920c42}">
+        <p14:section name="Pre-teach" id="{e09ec819-7c3d-fc25-b91a-1f4839a92ca8}">
           <p14:sldIdLst>
             <p14:sldId id="260"/>
           </p14:sldIdLst>
         </p14:section>
-        <p14:section name="Read-along" id="{03bd22d5-244c-f3d2-70a5-7f73e04344f1}">
+        <p14:section name="Read-along" id="{a7e3b190-1985-4299-ef73-41199b0bdbb8}">
           <p14:sldIdLst>
             <p14:sldId id="261"/>
             <p14:sldId id="262"/>
           </p14:sldIdLst>
         </p14:section>
-        <p14:section name="Teach" id="{34072901-ce4b-179d-6c71-bcbd3bd5c865}">
+        <p14:section name="Teach" id="{053c96e8-5471-b401-9704-d754906ed35c}">
           <p14:sldIdLst>
             <p14:sldId id="263"/>
             <p14:sldId id="264"/>
             <p14:sldId id="265"/>
           </p14:sldIdLst>
         </p14:section>
-        <p14:section name="Routes" id="{28e31239-9e25-1d42-9624-4853fd811a97}">
+        <p14:section name="Routes" id="{1befb154-7a9b-91a1-47db-f0783c6d8c72}">
           <p14:sldIdLst>
             <p14:sldId id="266"/>
             <p14:sldId id="267"/>
@@ -162,12 +162,12 @@
             <p14:sldId id="269"/>
           </p14:sldIdLst>
         </p14:section>
-        <p14:section name="Close" id="{7a343ef5-2745-2377-fe67-e1b407ca97f8}">
+        <p14:section name="Close" id="{28d3c783-50ba-8ad5-c838-bda81863aa3d}">
           <p14:sldIdLst>
             <p14:sldId id="270"/>
           </p14:sldIdLst>
         </p14:section>
-        <p14:section name="Answers" id="{95d36bb0-b4af-d954-370e-66c278876ddd}">
+        <p14:section name="Answers" id="{750fb4e2-5e0a-b928-0ff0-23ce121d780a}">
           <p14:sldIdLst>
             <p14:sldId id="271"/>
             <p14:sldId id="272"/>
